--- a/заняття_13_fast_api/презентація/fast_api.pptx
+++ b/заняття_13_fast_api/презентація/fast_api.pptx
@@ -3312,7 +3312,7 @@
               <a:buNone/>
             </a:pPr>
             <a:r>
-              <a:rPr lang="en-US" sz="850" dirty="0">
+              <a:rPr lang="en-US" sz="800" dirty="0">
                 <a:solidFill>
                   <a:srgbClr val="00E676"/>
                 </a:solidFill>
@@ -3322,14 +3322,14 @@
               </a:rPr>
               <a:t>from fastapi.security import OAuth2PasswordBearer, OAuth2PasswordRequestForm</a:t>
             </a:r>
-            <a:endParaRPr lang="en-US" sz="850" dirty="0"/>
-          </a:p>
-          <a:p>
-            <a:pPr marL="0" indent="0">
-              <a:buNone/>
-            </a:pPr>
-            <a:r>
-              <a:rPr lang="en-US" sz="850" dirty="0">
+            <a:endParaRPr lang="en-US" sz="800" dirty="0"/>
+          </a:p>
+          <a:p>
+            <a:pPr marL="0" indent="0">
+              <a:buNone/>
+            </a:pPr>
+            <a:r>
+              <a:rPr lang="en-US" sz="800" dirty="0">
                 <a:solidFill>
                   <a:srgbClr val="00E676"/>
                 </a:solidFill>
@@ -3339,14 +3339,14 @@
               </a:rPr>
               <a:t>from jose import jwt</a:t>
             </a:r>
-            <a:endParaRPr lang="en-US" sz="850" dirty="0"/>
-          </a:p>
-          <a:p>
-            <a:pPr marL="0" indent="0">
-              <a:buNone/>
-            </a:pPr>
-            <a:r>
-              <a:rPr lang="en-US" sz="850" dirty="0">
+            <a:endParaRPr lang="en-US" sz="800" dirty="0"/>
+          </a:p>
+          <a:p>
+            <a:pPr marL="0" indent="0">
+              <a:buNone/>
+            </a:pPr>
+            <a:r>
+              <a:rPr lang="en-US" sz="800" dirty="0">
                 <a:solidFill>
                   <a:srgbClr val="00E676"/>
                 </a:solidFill>
@@ -3356,20 +3356,20 @@
               </a:rPr>
               <a:t>from fastapi import Depends</a:t>
             </a:r>
-            <a:endParaRPr lang="en-US" sz="850" dirty="0"/>
-          </a:p>
-          <a:p>
-            <a:pPr marL="0" indent="0">
-              <a:buNone/>
-            </a:pPr>
-            <a:endParaRPr lang="en-US" sz="850" dirty="0"/>
-          </a:p>
-          <a:p>
-            <a:pPr marL="0" indent="0">
-              <a:buNone/>
-            </a:pPr>
-            <a:r>
-              <a:rPr lang="en-US" sz="850" dirty="0">
+            <a:endParaRPr lang="en-US" sz="800" dirty="0"/>
+          </a:p>
+          <a:p>
+            <a:pPr marL="0" indent="0">
+              <a:buNone/>
+            </a:pPr>
+            <a:endParaRPr lang="en-US" sz="800" dirty="0"/>
+          </a:p>
+          <a:p>
+            <a:pPr marL="0" indent="0">
+              <a:buNone/>
+            </a:pPr>
+            <a:r>
+              <a:rPr lang="en-US" sz="800" dirty="0">
                 <a:solidFill>
                   <a:srgbClr val="00E676"/>
                 </a:solidFill>
@@ -3379,14 +3379,14 @@
               </a:rPr>
               <a:t>oauth2_scheme = OAuth2PasswordBearer(tokenUrl="/login")</a:t>
             </a:r>
-            <a:endParaRPr lang="en-US" sz="850" dirty="0"/>
-          </a:p>
-          <a:p>
-            <a:pPr marL="0" indent="0">
-              <a:buNone/>
-            </a:pPr>
-            <a:r>
-              <a:rPr lang="en-US" sz="850" dirty="0">
+            <a:endParaRPr lang="en-US" sz="800" dirty="0"/>
+          </a:p>
+          <a:p>
+            <a:pPr marL="0" indent="0">
+              <a:buNone/>
+            </a:pPr>
+            <a:r>
+              <a:rPr lang="en-US" sz="800" dirty="0">
                 <a:solidFill>
                   <a:srgbClr val="00E676"/>
                 </a:solidFill>
@@ -3396,20 +3396,20 @@
               </a:rPr>
               <a:t>SECRET_KEY = "super-secret"</a:t>
             </a:r>
-            <a:endParaRPr lang="en-US" sz="850" dirty="0"/>
-          </a:p>
-          <a:p>
-            <a:pPr marL="0" indent="0">
-              <a:buNone/>
-            </a:pPr>
-            <a:endParaRPr lang="en-US" sz="850" dirty="0"/>
-          </a:p>
-          <a:p>
-            <a:pPr marL="0" indent="0">
-              <a:buNone/>
-            </a:pPr>
-            <a:r>
-              <a:rPr lang="en-US" sz="850" dirty="0">
+            <a:endParaRPr lang="en-US" sz="800" dirty="0"/>
+          </a:p>
+          <a:p>
+            <a:pPr marL="0" indent="0">
+              <a:buNone/>
+            </a:pPr>
+            <a:endParaRPr lang="en-US" sz="800" dirty="0"/>
+          </a:p>
+          <a:p>
+            <a:pPr marL="0" indent="0">
+              <a:buNone/>
+            </a:pPr>
+            <a:r>
+              <a:rPr lang="en-US" sz="800" dirty="0">
                 <a:solidFill>
                   <a:srgbClr val="00E676"/>
                 </a:solidFill>
@@ -3419,14 +3419,14 @@
               </a:rPr>
               <a:t>@app.post("/login")</a:t>
             </a:r>
-            <a:endParaRPr lang="en-US" sz="850" dirty="0"/>
-          </a:p>
-          <a:p>
-            <a:pPr marL="0" indent="0">
-              <a:buNone/>
-            </a:pPr>
-            <a:r>
-              <a:rPr lang="en-US" sz="850" dirty="0">
+            <a:endParaRPr lang="en-US" sz="800" dirty="0"/>
+          </a:p>
+          <a:p>
+            <a:pPr marL="0" indent="0">
+              <a:buNone/>
+            </a:pPr>
+            <a:r>
+              <a:rPr lang="en-US" sz="800" dirty="0">
                 <a:solidFill>
                   <a:srgbClr val="00E676"/>
                 </a:solidFill>
@@ -3436,14 +3436,14 @@
               </a:rPr>
               <a:t>def login(form: OAuth2PasswordRequestForm = Depends()):</a:t>
             </a:r>
-            <a:endParaRPr lang="en-US" sz="850" dirty="0"/>
-          </a:p>
-          <a:p>
-            <a:pPr marL="0" indent="0">
-              <a:buNone/>
-            </a:pPr>
-            <a:r>
-              <a:rPr lang="en-US" sz="850" dirty="0">
+            <a:endParaRPr lang="en-US" sz="800" dirty="0"/>
+          </a:p>
+          <a:p>
+            <a:pPr marL="0" indent="0">
+              <a:buNone/>
+            </a:pPr>
+            <a:r>
+              <a:rPr lang="en-US" sz="800" dirty="0">
                 <a:solidFill>
                   <a:srgbClr val="00E676"/>
                 </a:solidFill>
@@ -3453,14 +3453,14 @@
               </a:rPr>
               <a:t>    if form.username != "admin" or form.password != "1234":</a:t>
             </a:r>
-            <a:endParaRPr lang="en-US" sz="850" dirty="0"/>
-          </a:p>
-          <a:p>
-            <a:pPr marL="0" indent="0">
-              <a:buNone/>
-            </a:pPr>
-            <a:r>
-              <a:rPr lang="en-US" sz="850" dirty="0">
+            <a:endParaRPr lang="en-US" sz="800" dirty="0"/>
+          </a:p>
+          <a:p>
+            <a:pPr marL="0" indent="0">
+              <a:buNone/>
+            </a:pPr>
+            <a:r>
+              <a:rPr lang="en-US" sz="800" dirty="0">
                 <a:solidFill>
                   <a:srgbClr val="00E676"/>
                 </a:solidFill>
@@ -3470,14 +3470,14 @@
               </a:rPr>
               <a:t>        raise HTTPException(401, "Невірні дані")</a:t>
             </a:r>
-            <a:endParaRPr lang="en-US" sz="850" dirty="0"/>
-          </a:p>
-          <a:p>
-            <a:pPr marL="0" indent="0">
-              <a:buNone/>
-            </a:pPr>
-            <a:r>
-              <a:rPr lang="en-US" sz="850" dirty="0">
+            <a:endParaRPr lang="en-US" sz="800" dirty="0"/>
+          </a:p>
+          <a:p>
+            <a:pPr marL="0" indent="0">
+              <a:buNone/>
+            </a:pPr>
+            <a:r>
+              <a:rPr lang="en-US" sz="800" dirty="0">
                 <a:solidFill>
                   <a:srgbClr val="00E676"/>
                 </a:solidFill>
@@ -3487,14 +3487,14 @@
               </a:rPr>
               <a:t>    token = jwt.encode({"sub": form.username}, SECRET_KEY)</a:t>
             </a:r>
-            <a:endParaRPr lang="en-US" sz="850" dirty="0"/>
-          </a:p>
-          <a:p>
-            <a:pPr marL="0" indent="0">
-              <a:buNone/>
-            </a:pPr>
-            <a:r>
-              <a:rPr lang="en-US" sz="850" dirty="0">
+            <a:endParaRPr lang="en-US" sz="800" dirty="0"/>
+          </a:p>
+          <a:p>
+            <a:pPr marL="0" indent="0">
+              <a:buNone/>
+            </a:pPr>
+            <a:r>
+              <a:rPr lang="en-US" sz="800" dirty="0">
                 <a:solidFill>
                   <a:srgbClr val="00E676"/>
                 </a:solidFill>
@@ -3504,20 +3504,20 @@
               </a:rPr>
               <a:t>    return {"access_token": token, "token_type": "bearer"}</a:t>
             </a:r>
-            <a:endParaRPr lang="en-US" sz="850" dirty="0"/>
-          </a:p>
-          <a:p>
-            <a:pPr marL="0" indent="0">
-              <a:buNone/>
-            </a:pPr>
-            <a:endParaRPr lang="en-US" sz="850" dirty="0"/>
-          </a:p>
-          <a:p>
-            <a:pPr marL="0" indent="0">
-              <a:buNone/>
-            </a:pPr>
-            <a:r>
-              <a:rPr lang="en-US" sz="850" dirty="0">
+            <a:endParaRPr lang="en-US" sz="800" dirty="0"/>
+          </a:p>
+          <a:p>
+            <a:pPr marL="0" indent="0">
+              <a:buNone/>
+            </a:pPr>
+            <a:endParaRPr lang="en-US" sz="800" dirty="0"/>
+          </a:p>
+          <a:p>
+            <a:pPr marL="0" indent="0">
+              <a:buNone/>
+            </a:pPr>
+            <a:r>
+              <a:rPr lang="en-US" sz="800" dirty="0">
                 <a:solidFill>
                   <a:srgbClr val="00E676"/>
                 </a:solidFill>
@@ -3527,14 +3527,14 @@
               </a:rPr>
               <a:t>def get_current_user(token: str = Depends(oauth2_scheme)):</a:t>
             </a:r>
-            <a:endParaRPr lang="en-US" sz="850" dirty="0"/>
-          </a:p>
-          <a:p>
-            <a:pPr marL="0" indent="0">
-              <a:buNone/>
-            </a:pPr>
-            <a:r>
-              <a:rPr lang="en-US" sz="850" dirty="0">
+            <a:endParaRPr lang="en-US" sz="800" dirty="0"/>
+          </a:p>
+          <a:p>
+            <a:pPr marL="0" indent="0">
+              <a:buNone/>
+            </a:pPr>
+            <a:r>
+              <a:rPr lang="en-US" sz="800" dirty="0">
                 <a:solidFill>
                   <a:srgbClr val="00E676"/>
                 </a:solidFill>
@@ -3544,14 +3544,14 @@
               </a:rPr>
               <a:t>    payload = jwt.decode(token, SECRET_KEY, algorithms=["HS256"])</a:t>
             </a:r>
-            <a:endParaRPr lang="en-US" sz="850" dirty="0"/>
-          </a:p>
-          <a:p>
-            <a:pPr marL="0" indent="0">
-              <a:buNone/>
-            </a:pPr>
-            <a:r>
-              <a:rPr lang="en-US" sz="850" dirty="0">
+            <a:endParaRPr lang="en-US" sz="800" dirty="0"/>
+          </a:p>
+          <a:p>
+            <a:pPr marL="0" indent="0">
+              <a:buNone/>
+            </a:pPr>
+            <a:r>
+              <a:rPr lang="en-US" sz="800" dirty="0">
                 <a:solidFill>
                   <a:srgbClr val="00E676"/>
                 </a:solidFill>
@@ -3561,20 +3561,20 @@
               </a:rPr>
               <a:t>    return payload["sub"]</a:t>
             </a:r>
-            <a:endParaRPr lang="en-US" sz="850" dirty="0"/>
-          </a:p>
-          <a:p>
-            <a:pPr marL="0" indent="0">
-              <a:buNone/>
-            </a:pPr>
-            <a:endParaRPr lang="en-US" sz="850" dirty="0"/>
-          </a:p>
-          <a:p>
-            <a:pPr marL="0" indent="0">
-              <a:buNone/>
-            </a:pPr>
-            <a:r>
-              <a:rPr lang="en-US" sz="850" dirty="0">
+            <a:endParaRPr lang="en-US" sz="800" dirty="0"/>
+          </a:p>
+          <a:p>
+            <a:pPr marL="0" indent="0">
+              <a:buNone/>
+            </a:pPr>
+            <a:endParaRPr lang="en-US" sz="800" dirty="0"/>
+          </a:p>
+          <a:p>
+            <a:pPr marL="0" indent="0">
+              <a:buNone/>
+            </a:pPr>
+            <a:r>
+              <a:rPr lang="en-US" sz="800" dirty="0">
                 <a:solidFill>
                   <a:srgbClr val="00E676"/>
                 </a:solidFill>
@@ -3584,14 +3584,14 @@
               </a:rPr>
               <a:t>@router.post("/courses", status_code=201)</a:t>
             </a:r>
-            <a:endParaRPr lang="en-US" sz="850" dirty="0"/>
-          </a:p>
-          <a:p>
-            <a:pPr marL="0" indent="0">
-              <a:buNone/>
-            </a:pPr>
-            <a:r>
-              <a:rPr lang="en-US" sz="850" dirty="0">
+            <a:endParaRPr lang="en-US" sz="800" dirty="0"/>
+          </a:p>
+          <a:p>
+            <a:pPr marL="0" indent="0">
+              <a:buNone/>
+            </a:pPr>
+            <a:r>
+              <a:rPr lang="en-US" sz="800" dirty="0">
                 <a:solidFill>
                   <a:srgbClr val="00E676"/>
                 </a:solidFill>
@@ -3601,14 +3601,14 @@
               </a:rPr>
               <a:t>def create_course(course: CourseCreate,</a:t>
             </a:r>
-            <a:endParaRPr lang="en-US" sz="850" dirty="0"/>
-          </a:p>
-          <a:p>
-            <a:pPr marL="0" indent="0">
-              <a:buNone/>
-            </a:pPr>
-            <a:r>
-              <a:rPr lang="en-US" sz="850" dirty="0">
+            <a:endParaRPr lang="en-US" sz="800" dirty="0"/>
+          </a:p>
+          <a:p>
+            <a:pPr marL="0" indent="0">
+              <a:buNone/>
+            </a:pPr>
+            <a:r>
+              <a:rPr lang="en-US" sz="800" dirty="0">
                 <a:solidFill>
                   <a:srgbClr val="00E676"/>
                 </a:solidFill>
@@ -3618,14 +3618,14 @@
               </a:rPr>
               <a:t>                  user=Depends(get_current_user)):</a:t>
             </a:r>
-            <a:endParaRPr lang="en-US" sz="850" dirty="0"/>
-          </a:p>
-          <a:p>
-            <a:pPr marL="0" indent="0">
-              <a:buNone/>
-            </a:pPr>
-            <a:r>
-              <a:rPr lang="en-US" sz="850" dirty="0">
+            <a:endParaRPr lang="en-US" sz="800" dirty="0"/>
+          </a:p>
+          <a:p>
+            <a:pPr marL="0" indent="0">
+              <a:buNone/>
+            </a:pPr>
+            <a:r>
+              <a:rPr lang="en-US" sz="800" dirty="0">
                 <a:solidFill>
                   <a:srgbClr val="00E676"/>
                 </a:solidFill>
@@ -3635,14 +3635,14 @@
               </a:rPr>
               <a:t>    # Тільки авторизовані можуть створювати</a:t>
             </a:r>
-            <a:endParaRPr lang="en-US" sz="850" dirty="0"/>
-          </a:p>
-          <a:p>
-            <a:pPr marL="0" indent="0">
-              <a:buNone/>
-            </a:pPr>
-            <a:r>
-              <a:rPr lang="en-US" sz="850" dirty="0">
+            <a:endParaRPr lang="en-US" sz="800" dirty="0"/>
+          </a:p>
+          <a:p>
+            <a:pPr marL="0" indent="0">
+              <a:buNone/>
+            </a:pPr>
+            <a:r>
+              <a:rPr lang="en-US" sz="800" dirty="0">
                 <a:solidFill>
                   <a:srgbClr val="00E676"/>
                 </a:solidFill>
@@ -3652,7 +3652,7 @@
               </a:rPr>
               <a:t>    ...</a:t>
             </a:r>
-            <a:endParaRPr lang="en-US" sz="850" dirty="0"/>
+            <a:endParaRPr lang="en-US" sz="800" dirty="0"/>
           </a:p>
         </p:txBody>
       </p:sp>
@@ -11346,7 +11346,7 @@
         </p:blipFill>
         <p:spPr>
           <a:xfrm>
-            <a:off x="566928" y="3502152"/>
+            <a:off x="557784" y="3639312"/>
             <a:ext cx="274320" cy="274320"/>
           </a:xfrm>
           <a:prstGeom prst="rect">
@@ -11441,7 +11441,7 @@
         </p:blipFill>
         <p:spPr>
           <a:xfrm>
-            <a:off x="3401568" y="3502152"/>
+            <a:off x="3401568" y="3640207"/>
             <a:ext cx="274320" cy="274320"/>
           </a:xfrm>
           <a:prstGeom prst="rect">
@@ -11536,7 +11536,7 @@
         </p:blipFill>
         <p:spPr>
           <a:xfrm>
-            <a:off x="6236208" y="3502152"/>
+            <a:off x="6236208" y="3639312"/>
             <a:ext cx="274320" cy="274320"/>
           </a:xfrm>
           <a:prstGeom prst="rect">
@@ -12143,23 +12143,6 @@
                 <a:cs typeface="Courier New" pitchFamily="34" charset="-120"/>
               </a:rPr>
               <a:t>from pydantic import BaseModel</a:t>
-            </a:r>
-            <a:endParaRPr lang="en-US" sz="950" dirty="0"/>
-          </a:p>
-          <a:p>
-            <a:pPr marL="0" indent="0">
-              <a:buNone/>
-            </a:pPr>
-            <a:r>
-              <a:rPr lang="en-US" sz="950" dirty="0">
-                <a:solidFill>
-                  <a:srgbClr val="00E676"/>
-                </a:solidFill>
-                <a:latin typeface="Courier New" pitchFamily="34" charset="0"/>
-                <a:ea typeface="Courier New" pitchFamily="34" charset="-122"/>
-                <a:cs typeface="Courier New" pitchFamily="34" charset="-120"/>
-              </a:rPr>
-              <a:t>from typing import Optional</a:t>
             </a:r>
             <a:endParaRPr lang="en-US" sz="950" dirty="0"/>
           </a:p>
